--- a/media/exports/reports/2026-08/overtime.pptx
+++ b/media/exports/reports/2026-08/overtime.pptx
@@ -241,73 +241,73 @@
                 <c:formatCode>0.0"%";[Red](0.0"%")</c:formatCode>
                 <c:ptCount val="23"/>
                 <c:pt idx="0">
-                  <c:v>1.5</c:v>
+                  <c:v>1.6</c:v>
                 </c:pt>
                 <c:pt idx="1">
-                  <c:v>1.3</c:v>
+                  <c:v>2.7</c:v>
                 </c:pt>
                 <c:pt idx="2">
-                  <c:v>1.9</c:v>
+                  <c:v>2.2</c:v>
                 </c:pt>
                 <c:pt idx="3">
-                  <c:v>2.3</c:v>
+                  <c:v>3.0</c:v>
                 </c:pt>
                 <c:pt idx="4">
-                  <c:v>2.8</c:v>
+                  <c:v>4.6</c:v>
                 </c:pt>
                 <c:pt idx="5">
-                  <c:v>2.4</c:v>
+                  <c:v>4.4</c:v>
                 </c:pt>
                 <c:pt idx="6">
                   <c:v>3.6</c:v>
                 </c:pt>
                 <c:pt idx="7">
-                  <c:v>2.6</c:v>
+                  <c:v>3.7</c:v>
                 </c:pt>
                 <c:pt idx="8">
                   <c:v>2.8</c:v>
                 </c:pt>
                 <c:pt idx="9">
-                  <c:v>2.4</c:v>
+                  <c:v>3.3</c:v>
                 </c:pt>
                 <c:pt idx="10">
-                  <c:v>4.6</c:v>
+                  <c:v>3.3</c:v>
                 </c:pt>
                 <c:pt idx="11">
-                  <c:v>3.0</c:v>
+                  <c:v>3.7</c:v>
                 </c:pt>
                 <c:pt idx="12">
-                  <c:v>4.0</c:v>
+                  <c:v>3.9</c:v>
                 </c:pt>
                 <c:pt idx="13">
-                  <c:v>3.9</c:v>
+                  <c:v>3.8</c:v>
                 </c:pt>
                 <c:pt idx="14">
-                  <c:v>3.5</c:v>
+                  <c:v>7.7</c:v>
                 </c:pt>
                 <c:pt idx="15">
-                  <c:v>3.8</c:v>
+                  <c:v>3.1</c:v>
                 </c:pt>
                 <c:pt idx="16">
-                  <c:v>5.8</c:v>
+                  <c:v>4.2</c:v>
                 </c:pt>
                 <c:pt idx="17">
-                  <c:v>5.6</c:v>
+                  <c:v>4.2</c:v>
                 </c:pt>
                 <c:pt idx="18">
-                  <c:v>5.8</c:v>
+                  <c:v>5.9</c:v>
                 </c:pt>
                 <c:pt idx="19">
-                  <c:v>6.5</c:v>
+                  <c:v>6.7</c:v>
                 </c:pt>
                 <c:pt idx="20">
-                  <c:v>5.4</c:v>
+                  <c:v>7.2</c:v>
                 </c:pt>
                 <c:pt idx="21">
-                  <c:v>6.2</c:v>
+                  <c:v>4.9</c:v>
                 </c:pt>
                 <c:pt idx="22">
-                  <c:v>5.2</c:v>
+                  <c:v>5.6</c:v>
                 </c:pt>
               </c:numCache>
             </c:numRef>
@@ -356,7 +356,7 @@
         <c:axId val="-2100718248"/>
         <c:scaling>
           <c:orientation val="minMax"/>
-          <c:max val="8.0"/>
+          <c:max val="10.0"/>
           <c:min val="0.0"/>
         </c:scaling>
         <c:delete val="0"/>
@@ -491,10 +491,10 @@
                   <c:v>Paperwork and quotes</c:v>
                 </c:pt>
                 <c:pt idx="1">
-                  <c:v>Installation ran over</c:v>
+                  <c:v>Short-staffed</c:v>
                 </c:pt>
                 <c:pt idx="2">
-                  <c:v>Short-staffed</c:v>
+                  <c:v>Installation ran over</c:v>
                 </c:pt>
                 <c:pt idx="3">
                   <c:v>After-hours call-out</c:v>
@@ -509,16 +509,16 @@
                 <c:formatCode>#,##0;[Red](#,##0)</c:formatCode>
                 <c:ptCount val="4"/>
                 <c:pt idx="0">
-                  <c:v>2.0</c:v>
+                  <c:v>7.0</c:v>
                 </c:pt>
                 <c:pt idx="1">
                   <c:v>8.5</c:v>
                 </c:pt>
                 <c:pt idx="2">
-                  <c:v>10.0</c:v>
+                  <c:v>19.0</c:v>
                 </c:pt>
                 <c:pt idx="3">
-                  <c:v>33.0</c:v>
+                  <c:v>24.0</c:v>
                 </c:pt>
               </c:numCache>
             </c:numRef>
@@ -582,7 +582,7 @@
       <c:valAx>
         <c:axId val="-2113994440"/>
         <c:scaling>
-          <c:max val="37.949999999999996"/>
+          <c:max val="27.599999999999998"/>
           <c:min val="0.0"/>
         </c:scaling>
         <c:delete/>
@@ -713,22 +713,22 @@
                   <c:v>Technician T5</c:v>
                 </c:pt>
                 <c:pt idx="1">
+                  <c:v>Technician T2</c:v>
+                </c:pt>
+                <c:pt idx="2">
                   <c:v>Technician T3</c:v>
                 </c:pt>
-                <c:pt idx="2">
+                <c:pt idx="3">
+                  <c:v>Technician T7</c:v>
+                </c:pt>
+                <c:pt idx="4">
                   <c:v>Technician T1</c:v>
                 </c:pt>
-                <c:pt idx="3">
-                  <c:v>Technician T2</c:v>
-                </c:pt>
-                <c:pt idx="4">
-                  <c:v>Technician T7</c:v>
-                </c:pt>
                 <c:pt idx="5">
-                  <c:v>Technician T4</c:v>
+                  <c:v>Technician T6</c:v>
                 </c:pt>
                 <c:pt idx="6">
-                  <c:v>Technician T6</c:v>
+                  <c:v>Technician T4</c:v>
                 </c:pt>
               </c:strCache>
             </c:strRef>
@@ -740,25 +740,25 @@
                 <c:formatCode>#,##0;[Red](#,##0)</c:formatCode>
                 <c:ptCount val="7"/>
                 <c:pt idx="0">
-                  <c:v>5.5</c:v>
+                  <c:v>4.0</c:v>
                 </c:pt>
                 <c:pt idx="1">
                   <c:v>6.0</c:v>
                 </c:pt>
                 <c:pt idx="2">
-                  <c:v>6.0</c:v>
+                  <c:v>6.5</c:v>
                 </c:pt>
                 <c:pt idx="3">
-                  <c:v>7.5</c:v>
+                  <c:v>7.0</c:v>
                 </c:pt>
                 <c:pt idx="4">
-                  <c:v>7.5</c:v>
+                  <c:v>8.0</c:v>
                 </c:pt>
                 <c:pt idx="5">
-                  <c:v>8.0</c:v>
+                  <c:v>11.5</c:v>
                 </c:pt>
                 <c:pt idx="6">
-                  <c:v>13.0</c:v>
+                  <c:v>15.5</c:v>
                 </c:pt>
               </c:numCache>
             </c:numRef>
@@ -822,7 +822,7 @@
       <c:valAx>
         <c:axId val="-2113994440"/>
         <c:scaling>
-          <c:max val="14.95"/>
+          <c:max val="17.825"/>
           <c:min val="0.0"/>
         </c:scaling>
         <c:delete/>
@@ -1319,7 +1319,7 @@
           <a:lstStyle/>
           <a:p>
             <a:r>
-              <a:t>Where is overtime creeping up, and why?. Overtime, August: 5.2%; Overtime hours, August: 53.5 h; August last year: 4.6%. Technicians worked 53.5 h of overtime in August, 5.2% of ordinary hours (target under 5.0%), against 6.2% in July. Over the last year it has gone from 4.6% to 5.2%. After-hours call-out is the main reason: 33.0 h, 61.7% of the overtime. Technician T6 carried the most (13.0 h). Above target by 1.8 h.</a:t>
+              <a:t>Where is overtime creeping up, and why?. Overtime, August: 5.6%; Overtime hours, August: 58.5 h; August last year: 3.3%. Technicians worked 58.5 h of overtime in August, 5.6% of ordinary hours (target under 5.0%), against 4.9% in July. Over the last year it has gone from 3.3% to 5.6%. After-hours call-out is the main reason: 24.0 h, 41.0% of the overtime. Technician T4 carried the most (15.5 h). Above target by 6.4 h.</a:t>
             </a:r>
           </a:p>
         </p:txBody>
@@ -4874,7 +4874,7 @@
                 </a:solidFill>
                 <a:latin typeface="Roboto"/>
               </a:rPr>
-              <a:t>Data retrieved 2pm, Tue 6 Oct 2026 · Generated 8 Oct 2026, 6:29pm · Sample data · Made with Python (python-pptx)</a:t>
+              <a:t>Data retrieved 2pm, Tue 6 Oct 2026 · Generated 8 Oct 2026, 11:41pm · Sample data · Made with Python (python-pptx)</a:t>
             </a:r>
           </a:p>
         </p:txBody>
@@ -5220,7 +5220,7 @@
                 </a:solidFill>
                 <a:latin typeface="Roboto"/>
               </a:rPr>
-              <a:t>5.2%</a:t>
+              <a:t>5.6%</a:t>
             </a:r>
           </a:p>
         </p:txBody>
@@ -5386,7 +5386,7 @@
                 </a:solidFill>
                 <a:latin typeface="Roboto"/>
               </a:rPr>
-              <a:t>53.5 h</a:t>
+              <a:t>58.5 h</a:t>
             </a:r>
           </a:p>
         </p:txBody>
@@ -5425,7 +5425,7 @@
                 </a:solidFill>
                 <a:latin typeface="Roboto"/>
               </a:rPr>
-              <a:t>July 69.5 h</a:t>
+              <a:t>July 57.5 h</a:t>
             </a:r>
           </a:p>
         </p:txBody>
@@ -5552,7 +5552,7 @@
                 </a:solidFill>
                 <a:latin typeface="Roboto"/>
               </a:rPr>
-              <a:t>4.6%</a:t>
+              <a:t>3.3%</a:t>
             </a:r>
           </a:p>
         </p:txBody>
@@ -5591,7 +5591,7 @@
                 </a:solidFill>
                 <a:latin typeface="Roboto"/>
               </a:rPr>
-              <a:t>48.5 h of overtime</a:t>
+              <a:t>28.5 h of overtime</a:t>
             </a:r>
           </a:p>
         </p:txBody>
@@ -5736,7 +5736,7 @@
                 </a:solidFill>
                 <a:latin typeface="Roboto"/>
               </a:rPr>
-              <a:t>Technicians worked 53.5 h of overtime in August, 5.2% of ordinary hours (target under 5.0%), against 6.2% in July. Over the last year it has gone from 4.6% to 5.2%.</a:t>
+              <a:t>Technicians worked 58.5 h of overtime in August, 5.6% of ordinary hours (target under 5.0%), against 4.9% in July. Over the last year it has gone from 3.3% to 5.6%.</a:t>
             </a:r>
           </a:p>
         </p:txBody>
@@ -5863,7 +5863,7 @@
                 </a:solidFill>
                 <a:latin typeface="Roboto"/>
               </a:rPr>
-              <a:t>After-hours call-out is the main reason: 33.0 h, 61.7% of the overtime. Technician T6 carried the most (13.0 h). Above target by 1.8 h.</a:t>
+              <a:t>After-hours call-out is the main reason: 24.0 h, 41.0% of the overtime. Technician T4 carried the most (15.5 h). Above target by 6.4 h.</a:t>
             </a:r>
           </a:p>
         </p:txBody>
@@ -5941,7 +5941,7 @@
                 </a:solidFill>
                 <a:latin typeface="Roboto"/>
               </a:rPr>
-              <a:t>Data retrieved 2pm, Tue 6 Oct 2026 · Generated 8 Oct 2026, 6:29pm · Sample data · Made with Python (python-pptx)</a:t>
+              <a:t>Data retrieved 2pm, Tue 6 Oct 2026 · Generated 8 Oct 2026, 11:41pm · Sample data · Made with Python (python-pptx)</a:t>
             </a:r>
           </a:p>
         </p:txBody>
@@ -6256,7 +6256,7 @@
                 </a:solidFill>
                 <a:latin typeface="Roboto"/>
               </a:rPr>
-              <a:t>Data retrieved 2pm, Tue 6 Oct 2026 · Generated 8 Oct 2026, 6:29pm · Sample data · Made with Python (python-pptx)</a:t>
+              <a:t>Data retrieved 2pm, Tue 6 Oct 2026 · Generated 8 Oct 2026, 11:41pm · Sample data · Made with Python (python-pptx)</a:t>
             </a:r>
           </a:p>
         </p:txBody>
@@ -6571,7 +6571,7 @@
                 </a:solidFill>
                 <a:latin typeface="Roboto"/>
               </a:rPr>
-              <a:t>Data retrieved 2pm, Tue 6 Oct 2026 · Generated 8 Oct 2026, 6:29pm · Sample data · Made with Python (python-pptx)</a:t>
+              <a:t>Data retrieved 2pm, Tue 6 Oct 2026 · Generated 8 Oct 2026, 11:41pm · Sample data · Made with Python (python-pptx)</a:t>
             </a:r>
           </a:p>
         </p:txBody>

--- a/media/exports/reports/2026-08/overtime.pptx
+++ b/media/exports/reports/2026-08/overtime.pptx
@@ -1249,7 +1249,7 @@
           <a:lstStyle/>
           <a:p>
             <a:r>
-              <a:t>Where is overtime creeping up, and why?. Sample Electrical &amp; Air Pty Ltd. Period: August 2026. Each technician's paid hours, day by day: ordinary hours and overtime, with the main reason for the overtime.</a:t>
+              <a:t>Where is overtime creeping up, and why?. Sample Electrical &amp; Air Pty Ltd. Period: August 2026. In short: Overtime was 5.6% of ordinary hours in August (target under 5.0%), up from 3.3% a year earlier. Each technician's paid hours, day by day: ordinary hours and overtime, with the main reason for the overtime.</a:t>
             </a:r>
           </a:p>
         </p:txBody>
@@ -4709,7 +4709,7 @@
                 </a:solidFill>
                 <a:latin typeface="Roboto"/>
               </a:rPr>
-              <a:t>Period: August 2026. Each technician's paid hours, day by day: ordinary hours and overtime, with the main reason for the overtime.</a:t>
+              <a:t>Period: August 2026. In short: Overtime was 5.6% of ordinary hours in August (target under 5.0%), up from 3.3% a year earlier. Each technician's paid hours, day by day: ordinary hours and overtime, with the main reason for the overtime.</a:t>
             </a:r>
           </a:p>
         </p:txBody>
@@ -4874,7 +4874,7 @@
                 </a:solidFill>
                 <a:latin typeface="Roboto"/>
               </a:rPr>
-              <a:t>Data retrieved 2pm, Tue 6 Oct 2026 · Generated 8 Oct 2026, 11:41pm · Sample data · Made with Python (python-pptx)</a:t>
+              <a:t>Data retrieved 2pm, Tue 6 Oct 2026 · Generated 10 Oct 2026, 9:55pm · Sample data · Made with Python (python-pptx)</a:t>
             </a:r>
           </a:p>
         </p:txBody>
@@ -5941,7 +5941,7 @@
                 </a:solidFill>
                 <a:latin typeface="Roboto"/>
               </a:rPr>
-              <a:t>Data retrieved 2pm, Tue 6 Oct 2026 · Generated 8 Oct 2026, 11:41pm · Sample data · Made with Python (python-pptx)</a:t>
+              <a:t>Data retrieved 2pm, Tue 6 Oct 2026 · Generated 10 Oct 2026, 9:55pm · Sample data · Made with Python (python-pptx)</a:t>
             </a:r>
           </a:p>
         </p:txBody>
@@ -6256,7 +6256,7 @@
                 </a:solidFill>
                 <a:latin typeface="Roboto"/>
               </a:rPr>
-              <a:t>Data retrieved 2pm, Tue 6 Oct 2026 · Generated 8 Oct 2026, 11:41pm · Sample data · Made with Python (python-pptx)</a:t>
+              <a:t>Data retrieved 2pm, Tue 6 Oct 2026 · Generated 10 Oct 2026, 9:55pm · Sample data · Made with Python (python-pptx)</a:t>
             </a:r>
           </a:p>
         </p:txBody>
@@ -6571,7 +6571,7 @@
                 </a:solidFill>
                 <a:latin typeface="Roboto"/>
               </a:rPr>
-              <a:t>Data retrieved 2pm, Tue 6 Oct 2026 · Generated 8 Oct 2026, 11:41pm · Sample data · Made with Python (python-pptx)</a:t>
+              <a:t>Data retrieved 2pm, Tue 6 Oct 2026 · Generated 10 Oct 2026, 9:55pm · Sample data · Made with Python (python-pptx)</a:t>
             </a:r>
           </a:p>
         </p:txBody>
